--- a/backend/output/roboai_opiskelijat_pakkausjarjestelmat/powerpoint/template1.pptx
+++ b/backend/output/roboai_opiskelijat_pakkausjarjestelmat/powerpoint/template1.pptx
@@ -3878,7 +3878,7 @@
                 <a:cs typeface="Bai Jamjuree Bold"/>
                 <a:sym typeface="Bai Jamjuree Bold"/>
               </a:rPr>
-              <a:t>Pakkaustyön ohjausjärjestelmät</a:t>
+              <a:t>robo ai student</a:t>
             </a:r>
           </a:p>
         </p:txBody>
